--- a/MECH191_metallurgy/slideDecks/pptx/MECH191_Week14_Lecture.pptx
+++ b/MECH191_metallurgy/slideDecks/pptx/MECH191_Week14_Lecture.pptx
@@ -15439,7 +15439,7 @@
         </p:spPr>
         <p:txBody>
           <a:bodyPr wrap="none" lIns="0" rIns="0" tIns="0" bIns="0">
-            <a:spAutoFit/>
+            <a:noAutofit/>
           </a:bodyPr>
           <a:lstStyle/>
           <a:p>
@@ -15450,7 +15450,7 @@
                 </a:solidFill>
                 <a:latin typeface="Calibri"/>
               </a:rPr>
-              <a:t>Metallography Lab — Module 13</a:t>
+              <a:t>Alloy Research Portfolio — Module 13</a:t>
             </a:r>
           </a:p>
         </p:txBody>
@@ -15473,7 +15473,7 @@
         </p:spPr>
         <p:txBody>
           <a:bodyPr wrap="none" lIns="0" rIns="0" tIns="0" bIns="0">
-            <a:spAutoFit/>
+            <a:noAutofit/>
           </a:bodyPr>
           <a:lstStyle/>
           <a:p>
@@ -15484,7 +15484,7 @@
                 </a:solidFill>
                 <a:latin typeface="Calibri"/>
               </a:rPr>
-              <a:t>EXAMET-5-R-600-HD  ·  50–500×</a:t>
+              <a:t>No Microscope Required</a:t>
             </a:r>
           </a:p>
         </p:txBody>
@@ -15609,7 +15609,7 @@
         </p:spPr>
         <p:txBody>
           <a:bodyPr wrap="none" lIns="0" rIns="0" tIns="0" bIns="0">
-            <a:spAutoFit/>
+            <a:noAutofit/>
           </a:bodyPr>
           <a:lstStyle/>
           <a:p>
@@ -15620,7 +15620,7 @@
                 </a:solidFill>
                 <a:latin typeface="Calibri"/>
               </a:rPr>
-              <a:t>Trace zinc content across three brasses — single-phase (K), leaded (L), </a:t>
+              <a:t>Research 260, 360, and 464 brass: zinc content, phase structure, and</a:t>
             </a:r>
           </a:p>
         </p:txBody>
@@ -15643,7 +15643,7 @@
         </p:spPr>
         <p:txBody>
           <a:bodyPr wrap="none" lIns="0" rIns="0" tIns="0" bIns="0">
-            <a:spAutoFit/>
+            <a:noAutofit/>
           </a:bodyPr>
           <a:lstStyle/>
           <a:p>
@@ -15654,7 +15654,7 @@
                 </a:solidFill>
                 <a:latin typeface="Calibri"/>
               </a:rPr>
-              <a:t>duplex alpha-beta (M). This week's lab no longer uses a weld specimen </a:t>
+              <a:t>published HV for your Hardness Log. Welding fundamentals are covered</a:t>
             </a:r>
           </a:p>
         </p:txBody>
@@ -15677,7 +15677,7 @@
         </p:spPr>
         <p:txBody>
           <a:bodyPr wrap="none" lIns="0" rIns="0" tIns="0" bIns="0">
-            <a:spAutoFit/>
+            <a:noAutofit/>
           </a:bodyPr>
           <a:lstStyle/>
           <a:p>
@@ -15688,7 +15688,7 @@
                 </a:solidFill>
                 <a:latin typeface="Calibri"/>
               </a:rPr>
-              <a:t>— welding fundamentals remain in today's lecture.</a:t>
+              <a:t>in today's lecture, not in this research module.</a:t>
             </a:r>
           </a:p>
         </p:txBody>
@@ -15745,7 +15745,7 @@
         </p:spPr>
         <p:txBody>
           <a:bodyPr wrap="none" lIns="0" rIns="0" tIns="0" bIns="0">
-            <a:spAutoFit/>
+            <a:noAutofit/>
           </a:bodyPr>
           <a:lstStyle/>
           <a:p>
@@ -15756,7 +15756,7 @@
                 </a:solidFill>
                 <a:latin typeface="Calibri"/>
               </a:rPr>
-              <a:t>1  Observe — complete feature table</a:t>
+              <a:t>1  Research — record data &amp; sources</a:t>
             </a:r>
           </a:p>
         </p:txBody>
@@ -15779,7 +15779,7 @@
         </p:spPr>
         <p:txBody>
           <a:bodyPr wrap="none" lIns="0" rIns="0" tIns="0" bIns="0">
-            <a:spAutoFit/>
+            <a:noAutofit/>
           </a:bodyPr>
           <a:lstStyle/>
           <a:p>
@@ -15790,7 +15790,7 @@
                 </a:solidFill>
                 <a:latin typeface="Calibri"/>
               </a:rPr>
-              <a:t>2  Sketch — label magnification &amp; specimen</a:t>
+              <a:t>2  Answer — short-answer questions</a:t>
             </a:r>
           </a:p>
         </p:txBody>
@@ -15813,7 +15813,7 @@
         </p:spPr>
         <p:txBody>
           <a:bodyPr wrap="none" lIns="0" rIns="0" tIns="0" bIns="0">
-            <a:spAutoFit/>
+            <a:noAutofit/>
           </a:bodyPr>
           <a:lstStyle/>
           <a:p>
@@ -15824,7 +15824,7 @@
                 </a:solidFill>
                 <a:latin typeface="Calibri"/>
               </a:rPr>
-              <a:t>3  Answer — 4 short questions</a:t>
+              <a:t>3  Apply — critical-thinking &amp; equations</a:t>
             </a:r>
           </a:p>
         </p:txBody>
@@ -15847,7 +15847,7 @@
         </p:spPr>
         <p:txBody>
           <a:bodyPr wrap="none" lIns="0" rIns="0" tIns="0" bIns="0">
-            <a:spAutoFit/>
+            <a:noAutofit/>
           </a:bodyPr>
           <a:lstStyle/>
           <a:p>
@@ -15858,7 +15858,7 @@
                 </a:solidFill>
                 <a:latin typeface="Calibri"/>
               </a:rPr>
-              <a:t>Specimens to Check Out</a:t>
+              <a:t>Alloys of Record</a:t>
             </a:r>
           </a:p>
         </p:txBody>
@@ -15881,7 +15881,7 @@
         </p:spPr>
         <p:txBody>
           <a:bodyPr wrap="none" lIns="0" rIns="0" tIns="0" bIns="0">
-            <a:spAutoFit/>
+            <a:noAutofit/>
           </a:bodyPr>
           <a:lstStyle/>
           <a:p>
@@ -15892,7 +15892,7 @@
                 </a:solidFill>
                 <a:latin typeface="Calibri"/>
               </a:rPr>
-              <a:t>· Specimens K, L, M — 260, 360 &amp; 464 brass</a:t>
+              <a:t>· Alloys K, L, M — 260, 360 &amp; 464 brass</a:t>
             </a:r>
           </a:p>
         </p:txBody>
@@ -15915,7 +15915,7 @@
         </p:spPr>
         <p:txBody>
           <a:bodyPr wrap="none" lIns="0" rIns="0" tIns="0" bIns="0">
-            <a:spAutoFit/>
+            <a:noAutofit/>
           </a:bodyPr>
           <a:lstStyle/>
           <a:p>
@@ -15926,7 +15926,7 @@
                 </a:solidFill>
                 <a:latin typeface="Calibri"/>
               </a:rPr>
-              <a:t>How to check out the kit:</a:t>
+              <a:t>How to Complete This Module:</a:t>
             </a:r>
           </a:p>
         </p:txBody>
@@ -15949,7 +15949,7 @@
         </p:spPr>
         <p:txBody>
           <a:bodyPr wrap="none" lIns="0" rIns="0" tIns="0" bIns="0">
-            <a:spAutoFit/>
+            <a:noAutofit/>
           </a:bodyPr>
           <a:lstStyle/>
           <a:p>
@@ -15960,7 +15960,7 @@
                 </a:solidFill>
                 <a:latin typeface="Calibri"/>
               </a:rPr>
-              <a:t>1  See instructor after class today</a:t>
+              <a:t>1  Research the alloy(s) using credible sources</a:t>
             </a:r>
           </a:p>
         </p:txBody>
@@ -15983,7 +15983,7 @@
         </p:spPr>
         <p:txBody>
           <a:bodyPr wrap="none" lIns="0" rIns="0" tIns="0" bIns="0">
-            <a:spAutoFit/>
+            <a:noAutofit/>
           </a:bodyPr>
           <a:lstStyle/>
           <a:p>
@@ -15994,7 +15994,7 @@
                 </a:solidFill>
                 <a:latin typeface="Calibri"/>
               </a:rPr>
-              <a:t>2  Sign out the specimen tray</a:t>
+              <a:t>2  Record data with a source citation</a:t>
             </a:r>
           </a:p>
         </p:txBody>
@@ -16017,7 +16017,7 @@
         </p:spPr>
         <p:txBody>
           <a:bodyPr wrap="none" lIns="0" rIns="0" tIns="0" bIns="0">
-            <a:spAutoFit/>
+            <a:noAutofit/>
           </a:bodyPr>
           <a:lstStyle/>
           <a:p>
@@ -16028,7 +16028,7 @@
                 </a:solidFill>
                 <a:latin typeface="Calibri"/>
               </a:rPr>
-              <a:t>3  Use the EXAMET-5 at your convenience</a:t>
+              <a:t>3  Answer the short-answer questions</a:t>
             </a:r>
           </a:p>
         </p:txBody>
@@ -16051,7 +16051,7 @@
         </p:spPr>
         <p:txBody>
           <a:bodyPr wrap="none" lIns="0" rIns="0" tIns="0" bIns="0">
-            <a:spAutoFit/>
+            <a:noAutofit/>
           </a:bodyPr>
           <a:lstStyle/>
           <a:p>
@@ -16062,7 +16062,7 @@
                 </a:solidFill>
                 <a:latin typeface="Calibri"/>
               </a:rPr>
-              <a:t>4  Return kit before leaving class</a:t>
+              <a:t>4  Answer the critical-thinking questions</a:t>
             </a:r>
           </a:p>
         </p:txBody>
@@ -16085,7 +16085,7 @@
         </p:spPr>
         <p:txBody>
           <a:bodyPr wrap="none" lIns="0" rIns="0" tIns="0" bIns="0">
-            <a:spAutoFit/>
+            <a:noAutofit/>
           </a:bodyPr>
           <a:lstStyle/>
           <a:p>
@@ -16096,7 +16096,7 @@
                 </a:solidFill>
                 <a:latin typeface="Calibri"/>
               </a:rPr>
-              <a:t>5  Submit completed module with your portfolio</a:t>
+              <a:t>5  Keep the module with your portfolio</a:t>
             </a:r>
           </a:p>
         </p:txBody>
